--- a/Foundation_F3/Workshop/F3-W05_Apply_Workshop_L09-L10_Speak_It_Then_Write_It_Home_and_Family.pptx
+++ b/Foundation_F3/Workshop/F3-W05_Apply_Workshop_L09-L10_Speak_It_Then_Write_It_Home_and_Family.pptx
@@ -39817,14 +39817,14 @@
               <a:buNone/>
             </a:pPr>
             <a:r>
-              <a:rPr lang="en-US" sz="1000" b="1" spc="150" kern="0" dirty="0">
+              <a:rPr lang="en-US" sz="1000" b="1" spc="300" kern="0" dirty="0">
                 <a:solidFill>
                   <a:srgbClr val="2F6FB0"/>
                 </a:solidFill>
                 <a:latin typeface="Calibri" pitchFamily="34" charset="0"/>
                 <a:cs typeface="Amiri" pitchFamily="2" charset="-78"/>
               </a:rPr>
-              <a:t>PART 1 · STEP 2 · WHICH LESSON? · READ EACH CARD, THEN SORT IT</a:t>
+              <a:t>PART 1 · STEP 2 · SORT IT · READ EACH CARD, THEN SORT IT</a:t>
             </a:r>
             <a:endParaRPr lang="en-US" sz="1000" dirty="0"/>
           </a:p>
@@ -39901,7 +39901,7 @@
                 <a:ea typeface="Amiri" pitchFamily="2" charset="-78"/>
                 <a:cs typeface="Amiri" pitchFamily="2" charset="-78"/>
               </a:rPr>
-              <a:t>مِنْ أَيِّ دَرْسٍ؟</a:t>
+              <a:t>صَنِّفِ البِطَاقَاتِ</a:t>
             </a:r>
             <a:endParaRPr lang="ar-SA" sz="2800" dirty="0"/>
           </a:p>
@@ -41162,7 +41162,7 @@
                 <a:ea typeface="Amiri" pitchFamily="2" charset="-78"/>
                 <a:cs typeface="Amiri" pitchFamily="2" charset="-78"/>
               </a:rPr>
-              <a:t>مِنْ أَيِّ دَرْسٍ؟</a:t>
+              <a:t>صَنِّفِ البِطَاقَاتِ</a:t>
             </a:r>
             <a:endParaRPr lang="ar-SA" sz="2800" dirty="0"/>
           </a:p>

--- a/Foundation_F3/Workshop/F3-W05_Apply_Workshop_L09-L10_Speak_It_Then_Write_It_Home_and_Family.pptx
+++ b/Foundation_F3/Workshop/F3-W05_Apply_Workshop_L09-L10_Speak_It_Then_Write_It_Home_and_Family.pptx
@@ -6168,7 +6168,7 @@
                 <a:latin typeface="Calibri" pitchFamily="34" charset="0"/>
                 <a:cs typeface="Amiri" pitchFamily="2" charset="-78"/>
               </a:rPr>
-              <a:t>+ sentence 2: … </a:t>
+              <a:t>+ sentence 2: … ‏</a:t>
             </a:r>
             <a:pPr algn="l" indent="0" marL="0">
               <a:buNone/>
@@ -6195,7 +6195,7 @@
                 <a:latin typeface="Calibri" pitchFamily="34" charset="0"/>
                 <a:cs typeface="Amiri" pitchFamily="2" charset="-78"/>
               </a:rPr>
-              <a:t> …</a:t>
+              <a:t> …‏</a:t>
             </a:r>
             <a:endParaRPr lang="en-US" sz="1100" dirty="0"/>
           </a:p>
@@ -7462,7 +7462,7 @@
                 <a:latin typeface="Calibri" pitchFamily="34" charset="0"/>
                 <a:cs typeface="Amiri" pitchFamily="2" charset="-78"/>
               </a:rPr>
-              <a:t>Odd numbers come from F3-L09, even numbers from F3-L10. Core: a full sentence from the starter. Develop: add the “more” part. Stretch: link two answers with </a:t>
+              <a:t>Odd numbers come from F3-L09, even numbers from F3-L10. Core: a full sentence from the starter. Develop: add the “more” part. Stretch: link two answers with ‏</a:t>
             </a:r>
             <a:pPr algn="l" indent="0" marL="0">
               <a:buNone/>
@@ -7489,7 +7489,7 @@
                 <a:latin typeface="Calibri" pitchFamily="34" charset="0"/>
                 <a:cs typeface="Amiri" pitchFamily="2" charset="-78"/>
               </a:rPr>
-              <a:t>, </a:t>
+              <a:t>‏, ‏</a:t>
             </a:r>
             <a:pPr algn="l" indent="0" marL="0">
               <a:buNone/>
@@ -7516,7 +7516,7 @@
                 <a:latin typeface="Calibri" pitchFamily="34" charset="0"/>
                 <a:cs typeface="Amiri" pitchFamily="2" charset="-78"/>
               </a:rPr>
-              <a:t> or </a:t>
+              <a:t>‏ or ‏</a:t>
             </a:r>
             <a:pPr algn="l" indent="0" marL="0">
               <a:buNone/>
@@ -7543,7 +7543,7 @@
                 <a:latin typeface="Calibri" pitchFamily="34" charset="0"/>
                 <a:cs typeface="Amiri" pitchFamily="2" charset="-78"/>
               </a:rPr>
-              <a:t>. Swap after each question.</a:t>
+              <a:t>‏. Swap after each question.</a:t>
             </a:r>
             <a:endParaRPr lang="en-US" sz="1100" dirty="0"/>
           </a:p>
@@ -10866,7 +10866,7 @@
                 <a:latin typeface="Calibri" pitchFamily="34" charset="0"/>
                 <a:cs typeface="Amiri" pitchFamily="2" charset="-78"/>
               </a:rPr>
-              <a:t>Two sentences in each part, joined with </a:t>
+              <a:t>Two sentences in each part, joined with ‏</a:t>
             </a:r>
             <a:pPr algn="l" indent="0" marL="0">
               <a:buNone/>
@@ -10920,7 +10920,7 @@
                 <a:latin typeface="Calibri" pitchFamily="34" charset="0"/>
                 <a:cs typeface="Amiri" pitchFamily="2" charset="-78"/>
               </a:rPr>
-              <a:t>.</a:t>
+              <a:t>‏.</a:t>
             </a:r>
             <a:endParaRPr lang="en-US" sz="1150" dirty="0"/>
           </a:p>
@@ -11057,7 +11057,7 @@
                 <a:latin typeface="Calibri" pitchFamily="34" charset="0"/>
                 <a:cs typeface="Amiri" pitchFamily="2" charset="-78"/>
               </a:rPr>
-              <a:t>Use </a:t>
+              <a:t>Use ‏</a:t>
             </a:r>
             <a:pPr algn="l" indent="0" marL="0">
               <a:buNone/>
@@ -11084,7 +11084,7 @@
                 <a:latin typeface="Calibri" pitchFamily="34" charset="0"/>
                 <a:cs typeface="Amiri" pitchFamily="2" charset="-78"/>
               </a:rPr>
-              <a:t> and </a:t>
+              <a:t>‏ and ‏</a:t>
             </a:r>
             <a:pPr algn="l" indent="0" marL="0">
               <a:buNone/>
@@ -11111,7 +11111,7 @@
                 <a:latin typeface="Calibri" pitchFamily="34" charset="0"/>
                 <a:cs typeface="Amiri" pitchFamily="2" charset="-78"/>
               </a:rPr>
-              <a:t>, and a repair phrase if you need time: </a:t>
+              <a:t>‏, and a repair phrase if you need time: ‏</a:t>
             </a:r>
             <a:pPr algn="l" indent="0" marL="0">
               <a:buNone/>
@@ -11138,7 +11138,7 @@
                 <a:latin typeface="Calibri" pitchFamily="34" charset="0"/>
                 <a:cs typeface="Amiri" pitchFamily="2" charset="-78"/>
               </a:rPr>
-              <a:t> …</a:t>
+              <a:t> …‏</a:t>
             </a:r>
             <a:endParaRPr lang="en-US" sz="1150" dirty="0"/>
           </a:p>
@@ -17628,6 +17628,19 @@
               <a:buNone/>
             </a:pPr>
             <a:r>
+              <a:rPr lang="en-US" sz="1150" b="1" dirty="0">
+                <a:solidFill>
+                  <a:srgbClr val="1B3B6F"/>
+                </a:solidFill>
+                <a:latin typeface="Calibri" pitchFamily="34" charset="0"/>
+                <a:cs typeface="Amiri" pitchFamily="2" charset="-78"/>
+              </a:rPr>
+              <a:t>‏</a:t>
+            </a:r>
+            <a:pPr algn="l" indent="0" marL="0">
+              <a:buNone/>
+            </a:pPr>
+            <a:r>
               <a:rPr lang="ar-SA" altLang="en-US" sz="1500" b="1" dirty="0">
                 <a:solidFill>
                   <a:srgbClr val="1B3B6F"/>
@@ -17649,7 +17662,7 @@
                 <a:latin typeface="Calibri" pitchFamily="34" charset="0"/>
                 <a:cs typeface="Amiri" pitchFamily="2" charset="-78"/>
               </a:rPr>
-              <a:t> + pronoun: </a:t>
+              <a:t>‏ + pronoun: ‏</a:t>
             </a:r>
             <a:pPr algn="l" indent="0" marL="0">
               <a:buNone/>
@@ -17676,7 +17689,7 @@
                 <a:latin typeface="Calibri" pitchFamily="34" charset="0"/>
                 <a:cs typeface="Amiri" pitchFamily="2" charset="-78"/>
               </a:rPr>
-              <a:t> (it, m.).</a:t>
+              <a:t>‏ (it, m.).</a:t>
             </a:r>
             <a:endParaRPr lang="en-US" sz="1150" dirty="0"/>
           </a:p>
@@ -17880,6 +17893,19 @@
               <a:buNone/>
             </a:pPr>
             <a:r>
+              <a:rPr lang="en-US" sz="1150" b="1" dirty="0">
+                <a:solidFill>
+                  <a:srgbClr val="1B3B6F"/>
+                </a:solidFill>
+                <a:latin typeface="Calibri" pitchFamily="34" charset="0"/>
+                <a:cs typeface="Amiri" pitchFamily="2" charset="-78"/>
+              </a:rPr>
+              <a:t>‏</a:t>
+            </a:r>
+            <a:pPr algn="l" indent="0" marL="0">
+              <a:buNone/>
+            </a:pPr>
+            <a:r>
               <a:rPr lang="ar-SA" altLang="en-US" sz="1500" b="1" dirty="0">
                 <a:solidFill>
                   <a:srgbClr val="1B3B6F"/>
@@ -17901,7 +17927,7 @@
                 <a:latin typeface="Calibri" pitchFamily="34" charset="0"/>
                 <a:cs typeface="Amiri" pitchFamily="2" charset="-78"/>
               </a:rPr>
-              <a:t> = how many → answer with a number.</a:t>
+              <a:t>‏ = how many → answer with a number.</a:t>
             </a:r>
             <a:endParaRPr lang="en-US" sz="1150" dirty="0"/>
           </a:p>
@@ -18112,7 +18138,7 @@
                 <a:latin typeface="Calibri" pitchFamily="34" charset="0"/>
                 <a:cs typeface="Amiri" pitchFamily="2" charset="-78"/>
               </a:rPr>
-              <a:t>Plural </a:t>
+              <a:t>Plural ‏</a:t>
             </a:r>
             <a:pPr algn="l" indent="0" marL="0">
               <a:buNone/>
@@ -18139,7 +18165,7 @@
                 <a:latin typeface="Calibri" pitchFamily="34" charset="0"/>
                 <a:cs typeface="Amiri" pitchFamily="2" charset="-78"/>
               </a:rPr>
-              <a:t>; </a:t>
+              <a:t>‏; ‏</a:t>
             </a:r>
             <a:pPr algn="l" indent="0" marL="0">
               <a:buNone/>
@@ -18166,7 +18192,7 @@
                 <a:latin typeface="Calibri" pitchFamily="34" charset="0"/>
                 <a:cs typeface="Amiri" pitchFamily="2" charset="-78"/>
               </a:rPr>
-              <a:t> is masculine → </a:t>
+              <a:t>‏ is masculine → ‏</a:t>
             </a:r>
             <a:pPr algn="l" indent="0" marL="0">
               <a:buNone/>
@@ -18193,7 +18219,7 @@
                 <a:latin typeface="Calibri" pitchFamily="34" charset="0"/>
                 <a:cs typeface="Amiri" pitchFamily="2" charset="-78"/>
               </a:rPr>
-              <a:t>.</a:t>
+              <a:t>‏.</a:t>
             </a:r>
             <a:endParaRPr lang="en-US" sz="1150" dirty="0"/>
           </a:p>
@@ -20393,7 +20419,7 @@
                 <a:latin typeface="Calibri" pitchFamily="34" charset="0"/>
                 <a:cs typeface="Amiri" pitchFamily="2" charset="-78"/>
               </a:rPr>
-              <a:t>☐  At least one </a:t>
+              <a:t>☐  At least one ‏</a:t>
             </a:r>
             <a:pPr algn="l" indent="0" marL="0">
               <a:buNone/>
@@ -20420,7 +20446,7 @@
                 <a:latin typeface="Calibri" pitchFamily="34" charset="0"/>
                 <a:cs typeface="Amiri" pitchFamily="2" charset="-78"/>
               </a:rPr>
-              <a:t> and one </a:t>
+              <a:t>‏ and one ‏</a:t>
             </a:r>
             <a:pPr algn="l" indent="0" marL="0">
               <a:buNone/>
@@ -20447,7 +20473,7 @@
                 <a:latin typeface="Calibri" pitchFamily="34" charset="0"/>
                 <a:cs typeface="Amiri" pitchFamily="2" charset="-78"/>
               </a:rPr>
-              <a:t> (Develop).</a:t>
+              <a:t>‏ (Develop).</a:t>
             </a:r>
             <a:endParaRPr lang="en-US" sz="1200" dirty="0"/>
           </a:p>
@@ -24154,7 +24180,7 @@
                 <a:latin typeface="Calibri" pitchFamily="34" charset="0"/>
                 <a:cs typeface="Amiri" pitchFamily="2" charset="-78"/>
               </a:rPr>
-              <a:t>use linking words (</a:t>
+              <a:t>use linking words (‏</a:t>
             </a:r>
             <a:pPr algn="l" indent="0" marL="0">
               <a:buNone/>
@@ -24262,7 +24288,7 @@
                 <a:latin typeface="Calibri" pitchFamily="34" charset="0"/>
                 <a:cs typeface="Amiri" pitchFamily="2" charset="-78"/>
               </a:rPr>
-              <a:t>)?</a:t>
+              <a:t>‏)?</a:t>
             </a:r>
             <a:endParaRPr lang="en-US" sz="1100" dirty="0"/>
           </a:p>
@@ -28248,7 +28274,7 @@
                 <a:latin typeface="Calibri" pitchFamily="34" charset="0"/>
                 <a:cs typeface="Amiri" pitchFamily="2" charset="-78"/>
               </a:rPr>
-              <a:t>I added reasons (</a:t>
+              <a:t>I added reasons (‏</a:t>
             </a:r>
             <a:pPr algn="l" indent="0" marL="0">
               <a:buNone/>
@@ -28275,7 +28301,7 @@
                 <a:latin typeface="Calibri" pitchFamily="34" charset="0"/>
                 <a:cs typeface="Amiri" pitchFamily="2" charset="-78"/>
               </a:rPr>
-              <a:t>) and extra details without frames.</a:t>
+              <a:t>‏) and extra details without frames.</a:t>
             </a:r>
             <a:endParaRPr lang="en-US" sz="1300" dirty="0"/>
           </a:p>
@@ -32403,7 +32429,7 @@
                 <a:latin typeface="Calibri" pitchFamily="34" charset="0"/>
                 <a:cs typeface="Amiri" pitchFamily="2" charset="-78"/>
               </a:rPr>
-              <a:t>☐  Add a reason (</a:t>
+              <a:t>☐  Add a reason (‏</a:t>
             </a:r>
             <a:pPr algn="l" indent="0" marL="0">
               <a:buNone/>
@@ -32430,7 +32456,7 @@
                 <a:latin typeface="Calibri" pitchFamily="34" charset="0"/>
                 <a:cs typeface="Amiri" pitchFamily="2" charset="-78"/>
               </a:rPr>
-              <a:t>) and an extra detail to every point.</a:t>
+              <a:t>‏) and an extra detail to every point.</a:t>
             </a:r>
             <a:endParaRPr lang="en-US" sz="1300" dirty="0"/>
           </a:p>
@@ -33951,7 +33977,7 @@
                 <a:latin typeface="Calibri" pitchFamily="34" charset="0"/>
                 <a:cs typeface="Amiri" pitchFamily="2" charset="-78"/>
               </a:rPr>
-              <a:t>Join a word from each lesson in one sentence with </a:t>
+              <a:t>Join a word from each lesson in one sentence with ‏</a:t>
             </a:r>
             <a:pPr algn="l" indent="0" marL="0">
               <a:buNone/>
@@ -33978,7 +34004,7 @@
                 <a:latin typeface="Calibri" pitchFamily="34" charset="0"/>
                 <a:cs typeface="Amiri" pitchFamily="2" charset="-78"/>
               </a:rPr>
-              <a:t> or </a:t>
+              <a:t>‏ or ‏</a:t>
             </a:r>
             <a:pPr algn="l" indent="0" marL="0">
               <a:buNone/>
@@ -34005,7 +34031,7 @@
                 <a:latin typeface="Calibri" pitchFamily="34" charset="0"/>
                 <a:cs typeface="Amiri" pitchFamily="2" charset="-78"/>
               </a:rPr>
-              <a:t>.</a:t>
+              <a:t>‏.</a:t>
             </a:r>
             <a:endParaRPr lang="en-US" sz="1150" dirty="0"/>
           </a:p>
